--- a/index.pptx
+++ b/index.pptx
@@ -3372,7 +3372,9 @@
         <p:nvSpPr>
           <p:cNvPr id="1" name="TextBox 3"/>
           <p:cNvSpPr txBox="1"/>
-          <p:nvPr/>
+          <p:nvPr>
+            <p:ph idx="1"/>
+          </p:nvPr>
         </p:nvSpPr>
         <p:spPr>
           <a:xfrm>
@@ -5735,7 +5737,9 @@
         <p:nvSpPr>
           <p:cNvPr id="1" name="TextBox 3"/>
           <p:cNvSpPr txBox="1"/>
-          <p:nvPr/>
+          <p:nvPr>
+            <p:ph idx="1"/>
+          </p:nvPr>
         </p:nvSpPr>
         <p:spPr>
           <a:xfrm>
@@ -5842,7 +5846,9 @@
         <p:nvSpPr>
           <p:cNvPr id="1" name="TextBox 3"/>
           <p:cNvSpPr txBox="1"/>
-          <p:nvPr/>
+          <p:nvPr>
+            <p:ph idx="1"/>
+          </p:nvPr>
         </p:nvSpPr>
         <p:spPr>
           <a:xfrm>

--- a/index.pptx
+++ b/index.pptx
@@ -3190,7 +3190,7 @@
             </a:pPr>
             <a:r>
               <a:rPr/>
-              <a:t>2026-07-06</a:t>
+              <a:t>2026-07-11</a:t>
             </a:r>
           </a:p>
         </p:txBody>
